--- a/docs/reports/台灣產業趨勢監測週報_2026-09-21_2026-09-28.pptx
+++ b/docs/reports/台灣產業趨勢監測週報_2026-09-21_2026-09-28.pptx
@@ -183,37 +183,37 @@
                 <c:formatCode>General</c:formatCode>
                 <c:ptCount val="11"/>
                 <c:pt idx="0">
-                  <c:v>83</c:v>
+                  <c:v>84</c:v>
                 </c:pt>
                 <c:pt idx="1">
-                  <c:v>155</c:v>
+                  <c:v>156</c:v>
                 </c:pt>
                 <c:pt idx="2">
-                  <c:v>188</c:v>
+                  <c:v>195</c:v>
                 </c:pt>
                 <c:pt idx="3">
-                  <c:v>196</c:v>
+                  <c:v>205</c:v>
                 </c:pt>
                 <c:pt idx="4">
-                  <c:v>223</c:v>
+                  <c:v>230</c:v>
                 </c:pt>
                 <c:pt idx="5">
-                  <c:v>271</c:v>
+                  <c:v>281</c:v>
                 </c:pt>
                 <c:pt idx="6">
-                  <c:v>312</c:v>
+                  <c:v>320</c:v>
                 </c:pt>
                 <c:pt idx="7">
-                  <c:v>336</c:v>
+                  <c:v>343</c:v>
                 </c:pt>
                 <c:pt idx="8">
-                  <c:v>717</c:v>
+                  <c:v>761</c:v>
                 </c:pt>
                 <c:pt idx="9">
-                  <c:v>745</c:v>
+                  <c:v>770</c:v>
                 </c:pt>
                 <c:pt idx="10">
-                  <c:v>773</c:v>
+                  <c:v>799</c:v>
                 </c:pt>
               </c:numCache>
             </c:numRef>
@@ -329,13 +329,13 @@
                 <c:formatCode>General</c:formatCode>
                 <c:ptCount val="7"/>
                 <c:pt idx="0">
-                  <c:v>28</c:v>
+                  <c:v>29</c:v>
                 </c:pt>
                 <c:pt idx="1">
                   <c:v>16</c:v>
                 </c:pt>
                 <c:pt idx="2">
-                  <c:v>10</c:v>
+                  <c:v>11</c:v>
                 </c:pt>
                 <c:pt idx="3">
                   <c:v>10</c:v>
@@ -538,16 +538,16 @@
                 <c:formatCode>General</c:formatCode>
                 <c:ptCount val="6"/>
                 <c:pt idx="0">
-                  <c:v>180</c:v>
+                  <c:v>187</c:v>
                 </c:pt>
                 <c:pt idx="1">
-                  <c:v>98</c:v>
+                  <c:v>101</c:v>
                 </c:pt>
                 <c:pt idx="2">
-                  <c:v>58</c:v>
+                  <c:v>61</c:v>
                 </c:pt>
                 <c:pt idx="3">
-                  <c:v>28</c:v>
+                  <c:v>29</c:v>
                 </c:pt>
                 <c:pt idx="4">
                   <c:v>26</c:v>
@@ -3705,7 +3705,7 @@
           </a:p>
           <a:p>
             <a:r>
-              <a:t>產出:2026-09-28 14:11(台北時間)</a:t>
+              <a:t>產出:2026-09-28 18:54(台北時間)</a:t>
             </a:r>
           </a:p>
           <a:p>
@@ -3773,7 +3773,7 @@
               <a:defRPr sz="1600"/>
             </a:pPr>
             <a:r>
-              <a:t>本期共蒐集 8414 篇公開報導,可歸類 3999 篇</a:t>
+              <a:t>本期共蒐集 8763 篇公開報導,可歸類 4144 篇</a:t>
             </a:r>
           </a:p>
           <a:p>
@@ -3781,7 +3781,7 @@
               <a:defRPr sz="1600"/>
             </a:pPr>
             <a:r>
-              <a:t>高科技製造業:773 篇(佔可歸類 19.3%)</a:t>
+              <a:t>高科技製造業:799 篇(佔可歸類 19.3%)</a:t>
             </a:r>
           </a:p>
           <a:p>
@@ -3789,7 +3789,7 @@
               <a:defRPr sz="1600"/>
             </a:pPr>
             <a:r>
-              <a:t>金融業:745 篇(佔可歸類 18.6%)</a:t>
+              <a:t>金融業:770 篇(佔可歸類 18.6%)</a:t>
             </a:r>
           </a:p>
           <a:p>
@@ -3797,7 +3797,7 @@
               <a:defRPr sz="1600"/>
             </a:pPr>
             <a:r>
-              <a:t>政府教育單位:717 篇(佔可歸類 17.9%)</a:t>
+              <a:t>政府教育單位:761 篇(佔可歸類 18.4%)</a:t>
             </a:r>
           </a:p>
           <a:p>
@@ -3805,7 +3805,7 @@
               <a:defRPr sz="1600"/>
             </a:pPr>
             <a:r>
-              <a:t>最熱主題:AI 與自動化(818 篇)、利率與資金環境(313 篇)、地緣政治與供應鏈(294 篇)</a:t>
+              <a:t>最熱主題:AI 與自動化(843 篇)、利率與資金環境(328 篇)、地緣政治與供應鏈(307 篇)</a:t>
             </a:r>
           </a:p>
           <a:p>
@@ -3909,7 +3909,7 @@
           <a:lstStyle/>
           <a:p>
             <a:r>
-              <a:t>競品聲量對比(SOV)— 電腦品牌(合計 84 篇)</a:t>
+              <a:t>競品聲量對比(SOV)— 電腦品牌(合計 86 篇)</a:t>
             </a:r>
           </a:p>
         </p:txBody>
@@ -3966,7 +3966,7 @@
           <a:lstStyle/>
           <a:p>
             <a:r>
-              <a:t>競品聲量對比(SOV)— 半導體(合計 415 篇)</a:t>
+              <a:t>競品聲量對比(SOV)— 半導體(合計 429 篇)</a:t>
             </a:r>
           </a:p>
         </p:txBody>
@@ -4087,7 +4087,7 @@
               <a:defRPr sz="1600"/>
             </a:pPr>
             <a:r>
-              <a:t>蘋果:疑似負面 2 篇(命中:抄襲、裁員)</a:t>
+              <a:t>蘋果:疑似負面 3 篇(命中:抄襲、裁員)</a:t>
             </a:r>
           </a:p>
           <a:p>

--- a/docs/reports/台灣產業趨勢監測週報_2026-09-21_2026-09-28.pptx
+++ b/docs/reports/台灣產業趨勢監測週報_2026-09-21_2026-09-28.pptx
@@ -165,10 +165,10 @@
                   <c:v>資通訊業</c:v>
                 </c:pt>
                 <c:pt idx="8">
+                  <c:v>金融業</c:v>
+                </c:pt>
+                <c:pt idx="9">
                   <c:v>政府教育單位</c:v>
-                </c:pt>
-                <c:pt idx="9">
-                  <c:v>金融業</c:v>
                 </c:pt>
                 <c:pt idx="10">
                   <c:v>高科技製造業</c:v>
@@ -189,31 +189,31 @@
                   <c:v>156</c:v>
                 </c:pt>
                 <c:pt idx="2">
-                  <c:v>195</c:v>
+                  <c:v>199</c:v>
                 </c:pt>
                 <c:pt idx="3">
-                  <c:v>205</c:v>
+                  <c:v>208</c:v>
                 </c:pt>
                 <c:pt idx="4">
-                  <c:v>230</c:v>
+                  <c:v>234</c:v>
                 </c:pt>
                 <c:pt idx="5">
-                  <c:v>281</c:v>
+                  <c:v>284</c:v>
                 </c:pt>
                 <c:pt idx="6">
-                  <c:v>320</c:v>
+                  <c:v>325</c:v>
                 </c:pt>
                 <c:pt idx="7">
-                  <c:v>343</c:v>
+                  <c:v>349</c:v>
                 </c:pt>
                 <c:pt idx="8">
-                  <c:v>761</c:v>
+                  <c:v>773</c:v>
                 </c:pt>
                 <c:pt idx="9">
-                  <c:v>770</c:v>
+                  <c:v>787</c:v>
                 </c:pt>
                 <c:pt idx="10">
-                  <c:v>799</c:v>
+                  <c:v>804</c:v>
                 </c:pt>
               </c:numCache>
             </c:numRef>
@@ -329,10 +329,10 @@
                 <c:formatCode>General</c:formatCode>
                 <c:ptCount val="7"/>
                 <c:pt idx="0">
-                  <c:v>29</c:v>
+                  <c:v>31</c:v>
                 </c:pt>
                 <c:pt idx="1">
-                  <c:v>16</c:v>
+                  <c:v>18</c:v>
                 </c:pt>
                 <c:pt idx="2">
                   <c:v>11</c:v>
@@ -538,13 +538,13 @@
                 <c:formatCode>General</c:formatCode>
                 <c:ptCount val="6"/>
                 <c:pt idx="0">
-                  <c:v>187</c:v>
+                  <c:v>189</c:v>
                 </c:pt>
                 <c:pt idx="1">
                   <c:v>101</c:v>
                 </c:pt>
                 <c:pt idx="2">
-                  <c:v>61</c:v>
+                  <c:v>62</c:v>
                 </c:pt>
                 <c:pt idx="3">
                   <c:v>29</c:v>
@@ -3705,7 +3705,7 @@
           </a:p>
           <a:p>
             <a:r>
-              <a:t>產出:2026-09-28 18:54(台北時間)</a:t>
+              <a:t>產出:2026-09-28 20:01(台北時間)</a:t>
             </a:r>
           </a:p>
           <a:p>
@@ -3773,7 +3773,7 @@
               <a:defRPr sz="1600"/>
             </a:pPr>
             <a:r>
-              <a:t>本期共蒐集 8763 篇公開報導,可歸類 4144 篇</a:t>
+              <a:t>本期共蒐集 8910 篇公開報導,可歸類 4203 篇</a:t>
             </a:r>
           </a:p>
           <a:p>
@@ -3781,7 +3781,7 @@
               <a:defRPr sz="1600"/>
             </a:pPr>
             <a:r>
-              <a:t>高科技製造業:799 篇(佔可歸類 19.3%)</a:t>
+              <a:t>高科技製造業:804 篇(佔可歸類 19.1%)</a:t>
             </a:r>
           </a:p>
           <a:p>
@@ -3789,7 +3789,7 @@
               <a:defRPr sz="1600"/>
             </a:pPr>
             <a:r>
-              <a:t>金融業:770 篇(佔可歸類 18.6%)</a:t>
+              <a:t>政府教育單位:787 篇(佔可歸類 18.7%)</a:t>
             </a:r>
           </a:p>
           <a:p>
@@ -3797,7 +3797,7 @@
               <a:defRPr sz="1600"/>
             </a:pPr>
             <a:r>
-              <a:t>政府教育單位:761 篇(佔可歸類 18.4%)</a:t>
+              <a:t>金融業:773 篇(佔可歸類 18.4%)</a:t>
             </a:r>
           </a:p>
           <a:p>
@@ -3805,7 +3805,7 @@
               <a:defRPr sz="1600"/>
             </a:pPr>
             <a:r>
-              <a:t>最熱主題:AI 與自動化(843 篇)、利率與資金環境(328 篇)、地緣政治與供應鏈(307 篇)</a:t>
+              <a:t>最熱主題:AI 與自動化(851 篇)、利率與資金環境(331 篇)、地緣政治與供應鏈(309 篇)</a:t>
             </a:r>
           </a:p>
           <a:p>
@@ -3909,7 +3909,7 @@
           <a:lstStyle/>
           <a:p>
             <a:r>
-              <a:t>競品聲量對比(SOV)— 電腦品牌(合計 86 篇)</a:t>
+              <a:t>競品聲量對比(SOV)— 電腦品牌(合計 90 篇)</a:t>
             </a:r>
           </a:p>
         </p:txBody>
@@ -3966,7 +3966,7 @@
           <a:lstStyle/>
           <a:p>
             <a:r>
-              <a:t>競品聲量對比(SOV)— 半導體(合計 429 篇)</a:t>
+              <a:t>競品聲量對比(SOV)— 半導體(合計 432 篇)</a:t>
             </a:r>
           </a:p>
         </p:txBody>
